--- a/slides/pptx/week09.pptx
+++ b/slides/pptx/week09.pptx
@@ -682,7 +682,8 @@
           <a:p>
             <a:r>
               <a:rPr lang="en-US" dirty="0"/>
-              <a:t>Same targets as the W7 mock, weighted unevenly — don't present these as equal-weight. DVWA appears in this week's own README but isn't deployed anywhere in ctf.md's target list — correct it here so no one hunts for a container that isn't running. Juice Shop is similar: ctf.md's Targets line used to list it as an "(or OWASP Juice Shop)" alternative for the XSS slot, but no flag was ever planted there (seed_flags.py / the answer key only seed this course's own apps) — so it wasn't actually part of the graded surface, and that line has been removed from ctf.md. If a student asks, week05's app is the only XSS target; Juice Shop earns no credit. Extra challenges available in exams/item-bank.md (CTF pool) if you rotate.</a:t>
+              <a:t>Same targets as the W7 mock, weighted unevenly — don't present these as equal-weight. DVWA appears in this week's own README but isn't deployed anywhere in ctf.md's target list — correct it here so no one hunts for a container that isn't running. Juice Shop is similar: ctf.md's Targets line used to list it as an "(or OWASP Juice Shop)" alternative for the XSS slot, but no flag was ever planted there (seed_flags.py / the answer key only seed this course's own apps) — so it wasn't actually part of the graded surface, and that line has been removed from ctf.md. If a student asks, week05's app is the only XSS target; Juice Shop earns no credit. Extra challenges available in exams/item-bank.md (CTF pool) if you rotate.
+Diagram: Four categories: Injection (30 pts) from Week 4 — Boolean Bypass SQLi and Shell Out command injection, 15 each. Auth and Access Control (30 pts) from Week 6 — Not Your Order IDOR and Forge Ahead JWT forgery, 15 each. Cryptography (25 pts) from Week 3 — Crack It password cracking (15) and Penguin ECB oracle (10). XSS (15 pts) from Week 5 — Pop the Alert, stored only. Not against DVWA or Juice Shop — this course's own apps, the only targets a flag is actually planted on.</a:t>
             </a:r>
             <a:endParaRPr lang="en-US" dirty="0"/>
           </a:p>
@@ -1233,7 +1234,7 @@
       </p:grpSpPr>
       <p:pic>
         <p:nvPicPr>
-          <p:cNvPr id="2" name="Image 0" descr="/Users/pop7/Library/CloudStorage/OneDrive-MonsterConnectCo.,Ltd/Lecture/KOSEN69 - software-security/slides/pptx/assets/logo-small.png">    </p:cNvPr>
+          <p:cNvPr id="2" name="Image 0" descr="/private/tmp/claude-501/-Users-pop7-Library-CloudStorage-OneDrive-MonsterConnectCo--Ltd-Lecture-KOSEN69---software-security/e6d6556f-17de-403d-a9a0-cf2f846149b4/scratchpad/tree/slides/pptx/assets/logo-small.png">    </p:cNvPr>
           <p:cNvPicPr>
             <a:picLocks noChangeAspect="1"/>
           </p:cNvPicPr>
@@ -1654,7 +1655,7 @@
       </p:sp>
       <p:pic>
         <p:nvPicPr>
-          <p:cNvPr id="8" name="Image 1" descr="/Users/pop7/Library/CloudStorage/OneDrive-MonsterConnectCo.,Ltd/Lecture/KOSEN69 - software-security/slides/pptx/assets/logo-small.png">    </p:cNvPr>
+          <p:cNvPr id="8" name="Image 1" descr="/private/tmp/claude-501/-Users-pop7-Library-CloudStorage-OneDrive-MonsterConnectCo--Ltd-Lecture-KOSEN69---software-security/e6d6556f-17de-403d-a9a0-cf2f846149b4/scratchpad/tree/slides/pptx/assets/logo-small.png">    </p:cNvPr>
           <p:cNvPicPr>
             <a:picLocks noChangeAspect="1"/>
           </p:cNvPicPr>
@@ -1798,50 +1799,33 @@
           </a:p>
         </p:txBody>
       </p:sp>
-      <p:sp>
-        <p:nvSpPr>
-          <p:cNvPr id="5" name="Text 2"/>
-          <p:cNvSpPr/>
+      <p:pic>
+        <p:nvPicPr>
+          <p:cNvPr id="5" name="Image 1" descr="Four categories: Injection (30 pts) from Week 4 — Boolean Bypass SQLi and Shell Out command injection, 15 each. Auth and Access Control (30 pts) from Week 6 — Not Your Order IDOR and Forge Ahead JWT forgery, 15 each. Cryptography (25 pts) from Week 3 — Crack It password cracking (15) and Penguin ECB oracle (10). XSS (15 pts) from Week 5 — Pop the Alert, stored only. Not against DVWA or Juice Shop — this course's own apps, the only targets a flag is actually planted on.">    </p:cNvPr>
+          <p:cNvPicPr>
+            <a:picLocks noChangeAspect="1"/>
+          </p:cNvPicPr>
           <p:nvPr/>
-        </p:nvSpPr>
-        <p:spPr>
-          <a:xfrm>
-            <a:off x="548640" y="1325880"/>
-            <a:ext cx="8046720" cy="1920240"/>
-          </a:xfrm>
-          <a:prstGeom prst="rect">
-            <a:avLst/>
-          </a:prstGeom>
-          <a:noFill/>
-          <a:ln/>
-        </p:spPr>
-        <p:txBody>
-          <a:bodyPr wrap="square" lIns="0" tIns="0" rIns="0" bIns="0" rtlCol="0" anchor="t">
-            <a:normAutofit/>
-          </a:bodyPr>
-          <a:lstStyle/>
-          <a:p>
-            <a:pPr indent="0" marL="0">
-              <a:buNone/>
-            </a:pPr>
-            <a:r>
-              <a:rPr lang="en-US" sz="1400" dirty="0">
-                <a:solidFill>
-                  <a:srgbClr val="1F2937"/>
-                </a:solidFill>
-                <a:latin typeface="Calibri" pitchFamily="34" charset="0"/>
-                <a:ea typeface="Calibri" pitchFamily="34" charset="-122"/>
-                <a:cs typeface="Calibri" pitchFamily="34" charset="-120"/>
-              </a:rPr>
-              <a:t>See diagram: Four categories: Injection (30 pts) from Week 4 — Boolean Bypass SQLi and Shell Out command injection, 15 each. Auth and Access Control (30 pts) from Week 6 — Not Your Order IDOR and Forge Ahead JWT forgery, 15 each. Cryptography (25 pts) from Week 3 — Crack It password cracking (15) and Penguin ECB oracle (10). XSS (15 pts) from Week 5 — Pop the Alert, stored only. Not against DVWA or Juice Shop — this course's own apps, the only targets a flag is actually planted on. (web only)</a:t>
-            </a:r>
-            <a:endParaRPr lang="en-US" sz="1400" dirty="0"/>
-          </a:p>
-        </p:txBody>
-      </p:sp>
-      <p:sp>
-        <p:nvSpPr>
-          <p:cNvPr id="6" name="Text 3"/>
+        </p:nvPicPr>
+        <p:blipFill>
+          <a:blip r:embed="rId2"/>
+          <a:stretch>
+            <a:fillRect/>
+          </a:stretch>
+        </p:blipFill>
+        <p:spPr>
+          <a:xfrm>
+            <a:off x="2565722" y="1097280"/>
+            <a:ext cx="4012557" cy="3566160"/>
+          </a:xfrm>
+          <a:prstGeom prst="rect">
+            <a:avLst/>
+          </a:prstGeom>
+        </p:spPr>
+      </p:pic>
+      <p:sp>
+        <p:nvSpPr>
+          <p:cNvPr id="6" name="Text 2"/>
           <p:cNvSpPr/>
           <p:nvPr/>
         </p:nvSpPr>
@@ -1880,14 +1864,14 @@
       </p:sp>
       <p:pic>
         <p:nvPicPr>
-          <p:cNvPr id="7" name="Image 1" descr="/Users/pop7/Library/CloudStorage/OneDrive-MonsterConnectCo.,Ltd/Lecture/KOSEN69 - software-security/slides/pptx/assets/logo-small.png">    </p:cNvPr>
+          <p:cNvPr id="7" name="Image 2" descr="/private/tmp/claude-501/-Users-pop7-Library-CloudStorage-OneDrive-MonsterConnectCo--Ltd-Lecture-KOSEN69---software-security/e6d6556f-17de-403d-a9a0-cf2f846149b4/scratchpad/tree/slides/pptx/assets/logo-small.png">    </p:cNvPr>
           <p:cNvPicPr>
             <a:picLocks noChangeAspect="1"/>
           </p:cNvPicPr>
           <p:nvPr/>
         </p:nvPicPr>
         <p:blipFill>
-          <a:blip r:embed="rId2"/>
+          <a:blip r:embed="rId3"/>
           <a:stretch>
             <a:fillRect/>
           </a:stretch>
@@ -2181,7 +2165,7 @@
       </p:sp>
       <p:pic>
         <p:nvPicPr>
-          <p:cNvPr id="8" name="Image 1" descr="/Users/pop7/Library/CloudStorage/OneDrive-MonsterConnectCo.,Ltd/Lecture/KOSEN69 - software-security/slides/pptx/assets/logo-small.png">    </p:cNvPr>
+          <p:cNvPr id="8" name="Image 1" descr="/private/tmp/claude-501/-Users-pop7-Library-CloudStorage-OneDrive-MonsterConnectCo--Ltd-Lecture-KOSEN69---software-security/e6d6556f-17de-403d-a9a0-cf2f846149b4/scratchpad/tree/slides/pptx/assets/logo-small.png">    </p:cNvPr>
           <p:cNvPicPr>
             <a:picLocks noChangeAspect="1"/>
           </p:cNvPicPr>
@@ -2315,7 +2299,7 @@
       </p:sp>
       <p:pic>
         <p:nvPicPr>
-          <p:cNvPr id="4" name="Image 0" descr="/Users/pop7/Library/CloudStorage/OneDrive-MonsterConnectCo.,Ltd/Lecture/KOSEN69 - software-security/slides/pptx/assets/logo-small.png">    </p:cNvPr>
+          <p:cNvPr id="4" name="Image 0" descr="/private/tmp/claude-501/-Users-pop7-Library-CloudStorage-OneDrive-MonsterConnectCo--Ltd-Lecture-KOSEN69---software-security/e6d6556f-17de-403d-a9a0-cf2f846149b4/scratchpad/tree/slides/pptx/assets/logo-small.png">    </p:cNvPr>
           <p:cNvPicPr>
             <a:picLocks noChangeAspect="1"/>
           </p:cNvPicPr>
